--- a/docs/산출물_20260904/06_WCS_화면설계서.pptx
+++ b/docs/산출물_20260904/06_WCS_화면설계서.pptx
@@ -3365,8 +3365,8 @@
         </p:nvSpPr>
         <p:spPr>
           <a:xfrm>
-            <a:off x="548640" y="3291840"/>
-            <a:ext cx="7680960" cy="731520"/>
+            <a:off x="8503920" y="1188720"/>
+            <a:ext cx="3291840" cy="5029200"/>
           </a:xfrm>
           <a:prstGeom prst="rect">
             <a:avLst/>
@@ -3379,15 +3379,63 @@
           </a:bodyPr>
           <a:lstStyle/>
           <a:p>
-            <a:pPr algn="ctr"/>
-            <a:r>
-              <a:rPr sz="1400" b="0">
-                <a:solidFill>
-                  <a:srgbClr val="595959"/>
-                </a:solidFill>
-                <a:latin typeface="맑은 고딕"/>
-              </a:rPr>
-              <a:t>화면 설명 참조</a:t>
+            <a:pPr algn="l"/>
+            <a:r>
+              <a:rPr sz="1300" b="1">
+                <a:solidFill>
+                  <a:srgbClr val="1E2761"/>
+                </a:solidFill>
+                <a:latin typeface="맑은 고딕"/>
+              </a:rPr>
+              <a:t>■ 메뉴 Path</a:t>
+            </a:r>
+          </a:p>
+          <a:p>
+            <a:pPr algn="l"/>
+            <a:r>
+              <a:rPr sz="1100" b="0">
+                <a:solidFill>
+                  <a:srgbClr val="595959"/>
+                </a:solidFill>
+                <a:latin typeface="맑은 고딕"/>
+              </a:rPr>
+              <a:t>ECS ▷ 창고 모니터링 ▷ 작업번호 · 트랙번호</a:t>
+            </a:r>
+          </a:p>
+          <a:p>
+            <a:pPr algn="l"/>
+            <a:r>
+              <a:rPr sz="600" b="0">
+                <a:solidFill>
+                  <a:srgbClr val="595959"/>
+                </a:solidFill>
+                <a:latin typeface="맑은 고딕"/>
+              </a:rPr>
+              <a:t/>
+            </a:r>
+          </a:p>
+          <a:p>
+            <a:pPr algn="l"/>
+            <a:r>
+              <a:rPr sz="1300" b="1">
+                <a:solidFill>
+                  <a:srgbClr val="1E2761"/>
+                </a:solidFill>
+                <a:latin typeface="맑은 고딕"/>
+              </a:rPr>
+              <a:t>■ 프로그램 개요</a:t>
+            </a:r>
+          </a:p>
+          <a:p>
+            <a:pPr algn="l"/>
+            <a:r>
+              <a:rPr sz="1100" b="0">
+                <a:solidFill>
+                  <a:srgbClr val="595959"/>
+                </a:solidFill>
+                <a:latin typeface="맑은 고딕"/>
+              </a:rPr>
+              <a:t>메인 화면 각 위치에 표시할 문자를 작업번호 / 트랙번호 중에서 고른다.</a:t>
             </a:r>
           </a:p>
         </p:txBody>
@@ -3400,8 +3448,8 @@
         </p:nvSpPr>
         <p:spPr>
           <a:xfrm>
-            <a:off x="8503920" y="1188720"/>
-            <a:ext cx="3291840" cy="5029200"/>
+            <a:off x="457200" y="6400800"/>
+            <a:ext cx="3657600" cy="320040"/>
           </a:xfrm>
           <a:prstGeom prst="rect">
             <a:avLst/>
@@ -3416,61 +3464,13 @@
           <a:p>
             <a:pPr algn="l"/>
             <a:r>
-              <a:rPr sz="1300" b="1">
-                <a:solidFill>
-                  <a:srgbClr val="1E2761"/>
-                </a:solidFill>
-                <a:latin typeface="맑은 고딕"/>
-              </a:rPr>
-              <a:t>■ 메뉴 Path</a:t>
-            </a:r>
-          </a:p>
-          <a:p>
-            <a:pPr algn="l"/>
-            <a:r>
-              <a:rPr sz="1100" b="0">
-                <a:solidFill>
-                  <a:srgbClr val="595959"/>
-                </a:solidFill>
-                <a:latin typeface="맑은 고딕"/>
-              </a:rPr>
-              <a:t>ECS ▷ 창고 모니터링 ▷ 작업번호 · 트랙번호</a:t>
-            </a:r>
-          </a:p>
-          <a:p>
-            <a:pPr algn="l"/>
-            <a:r>
-              <a:rPr sz="600" b="0">
-                <a:solidFill>
-                  <a:srgbClr val="595959"/>
-                </a:solidFill>
-                <a:latin typeface="맑은 고딕"/>
-              </a:rPr>
-              <a:t/>
-            </a:r>
-          </a:p>
-          <a:p>
-            <a:pPr algn="l"/>
-            <a:r>
-              <a:rPr sz="1300" b="1">
-                <a:solidFill>
-                  <a:srgbClr val="1E2761"/>
-                </a:solidFill>
-                <a:latin typeface="맑은 고딕"/>
-              </a:rPr>
-              <a:t>■ 프로그램 개요</a:t>
-            </a:r>
-          </a:p>
-          <a:p>
-            <a:pPr algn="l"/>
-            <a:r>
-              <a:rPr sz="1100" b="0">
-                <a:solidFill>
-                  <a:srgbClr val="595959"/>
-                </a:solidFill>
-                <a:latin typeface="맑은 고딕"/>
-              </a:rPr>
-              <a:t>메인 화면 각 위치에 표시할 문자를 작업번호 / 트랙번호 중에서 고른다.</a:t>
+              <a:rPr sz="1000" b="0">
+                <a:solidFill>
+                  <a:srgbClr val="595959"/>
+                </a:solidFill>
+                <a:latin typeface="맑은 고딕"/>
+              </a:rPr>
+              <a:t>LG 생명과학 1동 WCS  |  화면설계서</a:t>
             </a:r>
           </a:p>
         </p:txBody>
@@ -3478,41 +3478,6 @@
       <p:sp>
         <p:nvSpPr>
           <p:cNvPr id="6" name="TextBox 5"/>
-          <p:cNvSpPr txBox="1"/>
-          <p:nvPr/>
-        </p:nvSpPr>
-        <p:spPr>
-          <a:xfrm>
-            <a:off x="457200" y="6400800"/>
-            <a:ext cx="3657600" cy="320040"/>
-          </a:xfrm>
-          <a:prstGeom prst="rect">
-            <a:avLst/>
-          </a:prstGeom>
-          <a:noFill/>
-        </p:spPr>
-        <p:txBody>
-          <a:bodyPr wrap="square" anchor="t" lIns="45720" rIns="45720">
-            <a:spAutoFit/>
-          </a:bodyPr>
-          <a:lstStyle/>
-          <a:p>
-            <a:pPr algn="l"/>
-            <a:r>
-              <a:rPr sz="1000" b="0">
-                <a:solidFill>
-                  <a:srgbClr val="595959"/>
-                </a:solidFill>
-                <a:latin typeface="맑은 고딕"/>
-              </a:rPr>
-              <a:t>LG 생명과학 1동 WCS  |  화면설계서</a:t>
-            </a:r>
-          </a:p>
-        </p:txBody>
-      </p:sp>
-      <p:sp>
-        <p:nvSpPr>
-          <p:cNvPr id="7" name="TextBox 6"/>
           <p:cNvSpPr txBox="1"/>
           <p:nvPr/>
         </p:nvSpPr>
@@ -6639,7 +6604,7 @@
                           </a:solidFill>
                           <a:latin typeface="맑은 고딕"/>
                         </a:rPr>
-                        <a:t>검토 반영 - 미사용 메뉴 정리, 캡처 갱신</a:t>
+                        <a:t>미사용 메뉴 정리, 캡처 갱신</a:t>
                       </a:r>
                     </a:p>
                   </a:txBody>
@@ -7165,8 +7130,8 @@
         </p:nvSpPr>
         <p:spPr>
           <a:xfrm>
-            <a:off x="548640" y="3291840"/>
-            <a:ext cx="7680960" cy="731520"/>
+            <a:off x="8503920" y="1188720"/>
+            <a:ext cx="3291840" cy="5029200"/>
           </a:xfrm>
           <a:prstGeom prst="rect">
             <a:avLst/>
@@ -7179,15 +7144,99 @@
           </a:bodyPr>
           <a:lstStyle/>
           <a:p>
-            <a:pPr algn="ctr"/>
-            <a:r>
-              <a:rPr sz="1400" b="0">
-                <a:solidFill>
-                  <a:srgbClr val="595959"/>
-                </a:solidFill>
-                <a:latin typeface="맑은 고딕"/>
-              </a:rPr>
-              <a:t>화면 설명 참조</a:t>
+            <a:pPr algn="l"/>
+            <a:r>
+              <a:rPr sz="1300" b="1">
+                <a:solidFill>
+                  <a:srgbClr val="1E2761"/>
+                </a:solidFill>
+                <a:latin typeface="맑은 고딕"/>
+              </a:rPr>
+              <a:t>■ 메뉴 Path</a:t>
+            </a:r>
+          </a:p>
+          <a:p>
+            <a:pPr algn="l"/>
+            <a:r>
+              <a:rPr sz="1100" b="0">
+                <a:solidFill>
+                  <a:srgbClr val="595959"/>
+                </a:solidFill>
+                <a:latin typeface="맑은 고딕"/>
+              </a:rPr>
+              <a:t>메인 화면에서 RGV 클릭</a:t>
+            </a:r>
+          </a:p>
+          <a:p>
+            <a:pPr algn="l"/>
+            <a:r>
+              <a:rPr sz="600" b="0">
+                <a:solidFill>
+                  <a:srgbClr val="595959"/>
+                </a:solidFill>
+                <a:latin typeface="맑은 고딕"/>
+              </a:rPr>
+              <a:t/>
+            </a:r>
+          </a:p>
+          <a:p>
+            <a:pPr algn="l"/>
+            <a:r>
+              <a:rPr sz="1300" b="1">
+                <a:solidFill>
+                  <a:srgbClr val="1E2761"/>
+                </a:solidFill>
+                <a:latin typeface="맑은 고딕"/>
+              </a:rPr>
+              <a:t>■ 프로그램 개요</a:t>
+            </a:r>
+          </a:p>
+          <a:p>
+            <a:pPr algn="l"/>
+            <a:r>
+              <a:rPr sz="1100" b="0">
+                <a:solidFill>
+                  <a:srgbClr val="595959"/>
+                </a:solidFill>
+                <a:latin typeface="맑은 고딕"/>
+              </a:rPr>
+              <a:t>RGV 상태와 작업 상태를 본다. 명령은 지시 재전송 / 삭제 / 강제완료 / 수동지시, 명령 그룹 아래에 일시정지(상태 표시 + 버튼).</a:t>
+            </a:r>
+          </a:p>
+          <a:p>
+            <a:pPr algn="l"/>
+            <a:r>
+              <a:rPr sz="600" b="0">
+                <a:solidFill>
+                  <a:srgbClr val="595959"/>
+                </a:solidFill>
+                <a:latin typeface="맑은 고딕"/>
+              </a:rPr>
+              <a:t/>
+            </a:r>
+          </a:p>
+          <a:p>
+            <a:pPr algn="l"/>
+            <a:r>
+              <a:rPr sz="1300" b="1">
+                <a:solidFill>
+                  <a:srgbClr val="1E2761"/>
+                </a:solidFill>
+                <a:latin typeface="맑은 고딕"/>
+              </a:rPr>
+              <a:t>■ 특기사항</a:t>
+            </a:r>
+          </a:p>
+          <a:p>
+            <a:pPr algn="l"/>
+            <a:r>
+              <a:rPr sz="1000" b="0">
+                <a:solidFill>
+                  <a:srgbClr val="595959"/>
+                </a:solidFill>
+                <a:latin typeface="맑은 고딕"/>
+              </a:rPr>
+              <a:t>· RGV 가 지시를 받지 않을 때(요청 플래그 잔류) [지시 삭제] 로 풀 수 있다.</a:t>
             </a:r>
           </a:p>
         </p:txBody>
@@ -7200,8 +7249,8 @@
         </p:nvSpPr>
         <p:spPr>
           <a:xfrm>
-            <a:off x="8503920" y="1188720"/>
-            <a:ext cx="3291840" cy="5029200"/>
+            <a:off x="457200" y="6400800"/>
+            <a:ext cx="3657600" cy="320040"/>
           </a:xfrm>
           <a:prstGeom prst="rect">
             <a:avLst/>
@@ -7216,97 +7265,13 @@
           <a:p>
             <a:pPr algn="l"/>
             <a:r>
-              <a:rPr sz="1300" b="1">
-                <a:solidFill>
-                  <a:srgbClr val="1E2761"/>
-                </a:solidFill>
-                <a:latin typeface="맑은 고딕"/>
-              </a:rPr>
-              <a:t>■ 메뉴 Path</a:t>
-            </a:r>
-          </a:p>
-          <a:p>
-            <a:pPr algn="l"/>
-            <a:r>
-              <a:rPr sz="1100" b="0">
-                <a:solidFill>
-                  <a:srgbClr val="595959"/>
-                </a:solidFill>
-                <a:latin typeface="맑은 고딕"/>
-              </a:rPr>
-              <a:t>메인 화면에서 RGV 클릭</a:t>
-            </a:r>
-          </a:p>
-          <a:p>
-            <a:pPr algn="l"/>
-            <a:r>
-              <a:rPr sz="600" b="0">
-                <a:solidFill>
-                  <a:srgbClr val="595959"/>
-                </a:solidFill>
-                <a:latin typeface="맑은 고딕"/>
-              </a:rPr>
-              <a:t/>
-            </a:r>
-          </a:p>
-          <a:p>
-            <a:pPr algn="l"/>
-            <a:r>
-              <a:rPr sz="1300" b="1">
-                <a:solidFill>
-                  <a:srgbClr val="1E2761"/>
-                </a:solidFill>
-                <a:latin typeface="맑은 고딕"/>
-              </a:rPr>
-              <a:t>■ 프로그램 개요</a:t>
-            </a:r>
-          </a:p>
-          <a:p>
-            <a:pPr algn="l"/>
-            <a:r>
-              <a:rPr sz="1100" b="0">
-                <a:solidFill>
-                  <a:srgbClr val="595959"/>
-                </a:solidFill>
-                <a:latin typeface="맑은 고딕"/>
-              </a:rPr>
-              <a:t>RGV 상태와 작업 상태를 본다. 명령은 지시 재전송 / 삭제 / 강제완료 / 수동지시, 명령 그룹 아래에 일시정지(상태 표시 + 버튼).</a:t>
-            </a:r>
-          </a:p>
-          <a:p>
-            <a:pPr algn="l"/>
-            <a:r>
-              <a:rPr sz="600" b="0">
-                <a:solidFill>
-                  <a:srgbClr val="595959"/>
-                </a:solidFill>
-                <a:latin typeface="맑은 고딕"/>
-              </a:rPr>
-              <a:t/>
-            </a:r>
-          </a:p>
-          <a:p>
-            <a:pPr algn="l"/>
-            <a:r>
-              <a:rPr sz="1300" b="1">
-                <a:solidFill>
-                  <a:srgbClr val="1E2761"/>
-                </a:solidFill>
-                <a:latin typeface="맑은 고딕"/>
-              </a:rPr>
-              <a:t>■ 특기사항</a:t>
-            </a:r>
-          </a:p>
-          <a:p>
-            <a:pPr algn="l"/>
-            <a:r>
               <a:rPr sz="1000" b="0">
                 <a:solidFill>
                   <a:srgbClr val="595959"/>
                 </a:solidFill>
                 <a:latin typeface="맑은 고딕"/>
               </a:rPr>
-              <a:t>· RGV 가 지시를 받지 않을 때(요청 플래그 잔류) [지시 삭제] 로 풀 수 있다.</a:t>
+              <a:t>LG 생명과학 1동 WCS  |  화면설계서</a:t>
             </a:r>
           </a:p>
         </p:txBody>
@@ -7314,41 +7279,6 @@
       <p:sp>
         <p:nvSpPr>
           <p:cNvPr id="6" name="TextBox 5"/>
-          <p:cNvSpPr txBox="1"/>
-          <p:nvPr/>
-        </p:nvSpPr>
-        <p:spPr>
-          <a:xfrm>
-            <a:off x="457200" y="6400800"/>
-            <a:ext cx="3657600" cy="320040"/>
-          </a:xfrm>
-          <a:prstGeom prst="rect">
-            <a:avLst/>
-          </a:prstGeom>
-          <a:noFill/>
-        </p:spPr>
-        <p:txBody>
-          <a:bodyPr wrap="square" anchor="t" lIns="45720" rIns="45720">
-            <a:spAutoFit/>
-          </a:bodyPr>
-          <a:lstStyle/>
-          <a:p>
-            <a:pPr algn="l"/>
-            <a:r>
-              <a:rPr sz="1000" b="0">
-                <a:solidFill>
-                  <a:srgbClr val="595959"/>
-                </a:solidFill>
-                <a:latin typeface="맑은 고딕"/>
-              </a:rPr>
-              <a:t>LG 생명과학 1동 WCS  |  화면설계서</a:t>
-            </a:r>
-          </a:p>
-        </p:txBody>
-      </p:sp>
-      <p:sp>
-        <p:nvSpPr>
-          <p:cNvPr id="7" name="TextBox 6"/>
           <p:cNvSpPr txBox="1"/>
           <p:nvPr/>
         </p:nvSpPr>

--- a/docs/산출물_20260904/06_WCS_화면설계서.pptx
+++ b/docs/산출물_20260904/06_WCS_화면설계서.pptx
@@ -7425,8 +7425,8 @@
         </p:blipFill>
         <p:spPr>
           <a:xfrm>
-            <a:off x="640080" y="1676811"/>
-            <a:ext cx="7498079" cy="4053016"/>
+            <a:off x="793254" y="1280160"/>
+            <a:ext cx="7191731" cy="4846320"/>
           </a:xfrm>
           <a:prstGeom prst="rect">
             <a:avLst/>

--- a/docs/산출물_20260904/06_WCS_화면설계서.pptx
+++ b/docs/산출물_20260904/06_WCS_화면설계서.pptx
@@ -3184,7 +3184,7 @@
                 </a:solidFill>
                 <a:latin typeface="맑은 고딕"/>
               </a:rPr>
-              <a:t>LG 생명과학 1동 자동창고</a:t>
+              <a:t>LG 화학 1동 자동창고</a:t>
             </a:r>
           </a:p>
         </p:txBody>
@@ -3470,7 +3470,7 @@
                 </a:solidFill>
                 <a:latin typeface="맑은 고딕"/>
               </a:rPr>
-              <a:t>LG 생명과학 1동 WCS  |  화면설계서</a:t>
+              <a:t>LG 화학 1동 WCS  |  화면설계서</a:t>
             </a:r>
           </a:p>
         </p:txBody>
@@ -3793,7 +3793,7 @@
                 </a:solidFill>
                 <a:latin typeface="맑은 고딕"/>
               </a:rPr>
-              <a:t>LG 생명과학 1동 WCS  |  화면설계서</a:t>
+              <a:t>LG 화학 1동 WCS  |  화면설계서</a:t>
             </a:r>
           </a:p>
         </p:txBody>
@@ -4116,7 +4116,7 @@
                 </a:solidFill>
                 <a:latin typeface="맑은 고딕"/>
               </a:rPr>
-              <a:t>LG 생명과학 1동 WCS  |  화면설계서</a:t>
+              <a:t>LG 화학 1동 WCS  |  화면설계서</a:t>
             </a:r>
           </a:p>
         </p:txBody>
@@ -4439,7 +4439,7 @@
                 </a:solidFill>
                 <a:latin typeface="맑은 고딕"/>
               </a:rPr>
-              <a:t>LG 생명과학 1동 WCS  |  화면설계서</a:t>
+              <a:t>LG 화학 1동 WCS  |  화면설계서</a:t>
             </a:r>
           </a:p>
         </p:txBody>
@@ -4714,7 +4714,7 @@
                 </a:solidFill>
                 <a:latin typeface="맑은 고딕"/>
               </a:rPr>
-              <a:t>LG 생명과학 1동 WCS  |  화면설계서</a:t>
+              <a:t>LG 화학 1동 WCS  |  화면설계서</a:t>
             </a:r>
           </a:p>
         </p:txBody>
@@ -5025,7 +5025,7 @@
                 </a:solidFill>
                 <a:latin typeface="맑은 고딕"/>
               </a:rPr>
-              <a:t>LG 생명과학 1동 WCS  |  화면설계서</a:t>
+              <a:t>LG 화학 1동 WCS  |  화면설계서</a:t>
             </a:r>
           </a:p>
         </p:txBody>
@@ -5300,7 +5300,7 @@
                 </a:solidFill>
                 <a:latin typeface="맑은 고딕"/>
               </a:rPr>
-              <a:t>LG 생명과학 1동 WCS  |  화면설계서</a:t>
+              <a:t>LG 화학 1동 WCS  |  화면설계서</a:t>
             </a:r>
           </a:p>
         </p:txBody>
@@ -5575,7 +5575,7 @@
                 </a:solidFill>
                 <a:latin typeface="맑은 고딕"/>
               </a:rPr>
-              <a:t>LG 생명과학 1동 WCS  |  화면설계서</a:t>
+              <a:t>LG 화학 1동 WCS  |  화면설계서</a:t>
             </a:r>
           </a:p>
         </p:txBody>
@@ -5886,7 +5886,7 @@
                 </a:solidFill>
                 <a:latin typeface="맑은 고딕"/>
               </a:rPr>
-              <a:t>LG 생명과학 1동 WCS  |  화면설계서</a:t>
+              <a:t>LG 화학 1동 WCS  |  화면설계서</a:t>
             </a:r>
           </a:p>
         </p:txBody>
@@ -6161,7 +6161,7 @@
                 </a:solidFill>
                 <a:latin typeface="맑은 고딕"/>
               </a:rPr>
-              <a:t>LG 생명과학 1동 WCS  |  화면설계서</a:t>
+              <a:t>LG 화학 1동 WCS  |  화면설계서</a:t>
             </a:r>
           </a:p>
         </p:txBody>
@@ -6649,7 +6649,7 @@
                 </a:solidFill>
                 <a:latin typeface="맑은 고딕"/>
               </a:rPr>
-              <a:t>LG 생명과학 1동 WCS  |  화면설계서</a:t>
+              <a:t>LG 화학 1동 WCS  |  화면설계서</a:t>
             </a:r>
           </a:p>
         </p:txBody>
@@ -6984,7 +6984,7 @@
                 </a:solidFill>
                 <a:latin typeface="맑은 고딕"/>
               </a:rPr>
-              <a:t>LG 생명과학 1동 WCS  |  화면설계서</a:t>
+              <a:t>LG 화학 1동 WCS  |  화면설계서</a:t>
             </a:r>
           </a:p>
         </p:txBody>
@@ -7271,7 +7271,7 @@
                 </a:solidFill>
                 <a:latin typeface="맑은 고딕"/>
               </a:rPr>
-              <a:t>LG 생명과학 1동 WCS  |  화면설계서</a:t>
+              <a:t>LG 화학 1동 WCS  |  화면설계서</a:t>
             </a:r>
           </a:p>
         </p:txBody>
@@ -7594,7 +7594,7 @@
                 </a:solidFill>
                 <a:latin typeface="맑은 고딕"/>
               </a:rPr>
-              <a:t>LG 생명과학 1동 WCS  |  화면설계서</a:t>
+              <a:t>LG 화학 1동 WCS  |  화면설계서</a:t>
             </a:r>
           </a:p>
         </p:txBody>
@@ -7869,7 +7869,7 @@
                 </a:solidFill>
                 <a:latin typeface="맑은 고딕"/>
               </a:rPr>
-              <a:t>LG 생명과학 1동 WCS  |  화면설계서</a:t>
+              <a:t>LG 화학 1동 WCS  |  화면설계서</a:t>
             </a:r>
           </a:p>
         </p:txBody>
@@ -8180,7 +8180,7 @@
                 </a:solidFill>
                 <a:latin typeface="맑은 고딕"/>
               </a:rPr>
-              <a:t>LG 생명과학 1동 WCS  |  화면설계서</a:t>
+              <a:t>LG 화학 1동 WCS  |  화면설계서</a:t>
             </a:r>
           </a:p>
         </p:txBody>
@@ -8816,7 +8816,7 @@
                 </a:solidFill>
                 <a:latin typeface="맑은 고딕"/>
               </a:rPr>
-              <a:t>LG 생명과학 1동 WCS  |  화면설계서</a:t>
+              <a:t>LG 화학 1동 WCS  |  화면설계서</a:t>
             </a:r>
           </a:p>
         </p:txBody>
@@ -9175,7 +9175,7 @@
                 </a:solidFill>
                 <a:latin typeface="맑은 고딕"/>
               </a:rPr>
-              <a:t>LG 생명과학 1동 WCS  |  화면설계서</a:t>
+              <a:t>LG 화학 1동 WCS  |  화면설계서</a:t>
             </a:r>
           </a:p>
         </p:txBody>
@@ -9498,7 +9498,7 @@
                 </a:solidFill>
                 <a:latin typeface="맑은 고딕"/>
               </a:rPr>
-              <a:t>LG 생명과학 1동 WCS  |  화면설계서</a:t>
+              <a:t>LG 화학 1동 WCS  |  화면설계서</a:t>
             </a:r>
           </a:p>
         </p:txBody>
@@ -9821,7 +9821,7 @@
                 </a:solidFill>
                 <a:latin typeface="맑은 고딕"/>
               </a:rPr>
-              <a:t>LG 생명과학 1동 WCS  |  화면설계서</a:t>
+              <a:t>LG 화학 1동 WCS  |  화면설계서</a:t>
             </a:r>
           </a:p>
         </p:txBody>
@@ -10132,7 +10132,7 @@
                 </a:solidFill>
                 <a:latin typeface="맑은 고딕"/>
               </a:rPr>
-              <a:t>LG 생명과학 1동 WCS  |  화면설계서</a:t>
+              <a:t>LG 화학 1동 WCS  |  화면설계서</a:t>
             </a:r>
           </a:p>
         </p:txBody>
@@ -10467,7 +10467,7 @@
                 </a:solidFill>
                 <a:latin typeface="맑은 고딕"/>
               </a:rPr>
-              <a:t>LG 생명과학 1동 WCS  |  화면설계서</a:t>
+              <a:t>LG 화학 1동 WCS  |  화면설계서</a:t>
             </a:r>
           </a:p>
         </p:txBody>
@@ -10742,7 +10742,7 @@
                 </a:solidFill>
                 <a:latin typeface="맑은 고딕"/>
               </a:rPr>
-              <a:t>LG 생명과학 1동 WCS  |  화면설계서</a:t>
+              <a:t>LG 화학 1동 WCS  |  화면설계서</a:t>
             </a:r>
           </a:p>
         </p:txBody>
